--- a/data/employees/EMP048/AST-EMP048-01.pptx
+++ b/data/employees/EMP048/AST-EMP048-01.pptx
@@ -9,6 +9,7 @@
     <p:sldId id="257" r:id="rId8"/>
     <p:sldId id="258" r:id="rId9"/>
     <p:sldId id="259" r:id="rId10"/>
+    <p:sldId id="260" r:id="rId11"/>
   </p:sldIdLst>
   <p:sldSz cx="9144000" cy="6858000" type="screen4x3"/>
   <p:notesSz cx="6858000" cy="9144000"/>
@@ -3098,42 +3099,55 @@
             <a:spLocks noGrp="1"/>
           </p:cNvSpPr>
           <p:nvPr>
-            <p:ph type="ctrTitle"/>
-          </p:nvPr>
-        </p:nvSpPr>
-        <p:spPr/>
-        <p:txBody>
-          <a:bodyPr/>
-          <a:lstStyle/>
-          <a:p>
-            <a:r>
-              <a:t>Project update deck - EMP048</a:t>
-            </a:r>
-          </a:p>
-        </p:txBody>
-      </p:sp>
-      <p:sp>
-        <p:nvSpPr>
-          <p:cNvPr id="3" name="Subtitle 2"/>
-          <p:cNvSpPr>
-            <a:spLocks noGrp="1"/>
-          </p:cNvSpPr>
-          <p:nvPr>
-            <p:ph type="subTitle" idx="1"/>
-          </p:nvPr>
-        </p:nvSpPr>
-        <p:spPr/>
-        <p:txBody>
-          <a:bodyPr/>
-          <a:lstStyle/>
-          <a:p>
-            <a:r>
-              <a:t>Jamie Brown | Engineer | Engineering</a:t>
-            </a:r>
-          </a:p>
-          <a:p>
-            <a:r>
-              <a:t>Prepared: 2025-02-19</a:t>
+            <p:ph type="title"/>
+          </p:nvPr>
+        </p:nvSpPr>
+        <p:spPr/>
+        <p:txBody>
+          <a:bodyPr/>
+          <a:lstStyle/>
+          <a:p>
+            <a:r>
+              <a:t>Ast Emp048 01 - EMP048</a:t>
+            </a:r>
+          </a:p>
+        </p:txBody>
+      </p:sp>
+      <p:sp>
+        <p:nvSpPr>
+          <p:cNvPr id="3" name="Content Placeholder 2"/>
+          <p:cNvSpPr>
+            <a:spLocks noGrp="1"/>
+          </p:cNvSpPr>
+          <p:nvPr>
+            <p:ph idx="1"/>
+          </p:nvPr>
+        </p:nvSpPr>
+        <p:spPr/>
+        <p:txBody>
+          <a:bodyPr/>
+          <a:lstStyle/>
+          <a:p>
+            <a:r>
+              <a:t>Slide 1: Executive Summary</a:t>
+            </a:r>
+          </a:p>
+          <a:p>
+            <a:pPr lvl="1"/>
+            <a:r>
+              <a:t>Section 1: Automation backlog refinement. EMP048 contributes to ast emp048 01 through recurring collaboration, clear ownership boundaries, and measurable outcomes. The team captures decisions, open issues, and handoffs so that knowledge remains discoverable for future programs.</a:t>
+            </a:r>
+          </a:p>
+          <a:p>
+            <a:pPr lvl="1"/>
+            <a:r>
+              <a:t>Section 2: Department KPI performance. EMP048 contributes to ast emp048 01 through recurring collaboration, clear ownership boundaries, and measurable outcomes. The team captures decisions, open issues, and handoffs so that knowledge remains discoverable for future programs.</a:t>
+            </a:r>
+          </a:p>
+          <a:p>
+            <a:pPr lvl="1"/>
+            <a:r>
+              <a:t>Section 3: Customer escalation analysis. EMP048 contributes to ast emp048 01 through recurring collaboration, clear ownership boundaries, and measurable outcomes. The team captures decisions, open issues, and handoffs so that knowledge remains discoverable for future programs.</a:t>
             </a:r>
           </a:p>
         </p:txBody>
@@ -3172,7 +3186,7 @@
           <a:lstStyle/>
           <a:p>
             <a:r>
-              <a:t>Sprint Velocity Trends</a:t>
+              <a:t>Ast Emp048 01 - EMP048</a:t>
             </a:r>
           </a:p>
         </p:txBody>
@@ -3193,17 +3207,25 @@
           <a:lstStyle/>
           <a:p>
             <a:r>
-              <a:t>Overview of Sprint Velocity Trends for Engineering department.</a:t>
-            </a:r>
-          </a:p>
-          <a:p>
-            <a:r>
-              <a:t>Responsible: Jamie Brown (Engineer)</a:t>
-            </a:r>
-          </a:p>
-          <a:p>
-            <a:r>
-              <a:t>Location: Fremont | Skills: Power BI, MLOps, Synapse, SQL</a:t>
+              <a:t>Slide 2: Executive Summary</a:t>
+            </a:r>
+          </a:p>
+          <a:p>
+            <a:pPr lvl="1"/>
+            <a:r>
+              <a:t>Section 1: Fabric semantic model planning. EMP048 contributes to ast emp048 01 through recurring collaboration, clear ownership boundaries, and measurable outcomes. The team captures decisions, open issues, and handoffs so that knowledge remains discoverable for future programs.</a:t>
+            </a:r>
+          </a:p>
+          <a:p>
+            <a:pPr lvl="1"/>
+            <a:r>
+              <a:t>Section 2: Fabric semantic model planning. EMP048 contributes to ast emp048 01 through recurring collaboration, clear ownership boundaries, and measurable outcomes. The team captures decisions, open issues, and handoffs so that knowledge remains discoverable for future programs.</a:t>
+            </a:r>
+          </a:p>
+          <a:p>
+            <a:pPr lvl="1"/>
+            <a:r>
+              <a:t>Section 3: Automation backlog refinement. EMP048 contributes to ast emp048 01 through recurring collaboration, clear ownership boundaries, and measurable outcomes. The team captures decisions, open issues, and handoffs so that knowledge remains discoverable for future programs.</a:t>
             </a:r>
           </a:p>
         </p:txBody>
@@ -3242,7 +3264,7 @@
           <a:lstStyle/>
           <a:p>
             <a:r>
-              <a:t>Technical Debt Dashboard</a:t>
+              <a:t>Ast Emp048 01 - EMP048</a:t>
             </a:r>
           </a:p>
         </p:txBody>
@@ -3263,17 +3285,25 @@
           <a:lstStyle/>
           <a:p>
             <a:r>
-              <a:t>Overview of Technical Debt Dashboard for Engineering department.</a:t>
-            </a:r>
-          </a:p>
-          <a:p>
-            <a:r>
-              <a:t>Responsible: Jamie Brown (Engineer)</a:t>
-            </a:r>
-          </a:p>
-          <a:p>
-            <a:r>
-              <a:t>Location: Fremont | Skills: Power BI, MLOps, Synapse, SQL</a:t>
+              <a:t>Slide 3: Executive Summary</a:t>
+            </a:r>
+          </a:p>
+          <a:p>
+            <a:pPr lvl="1"/>
+            <a:r>
+              <a:t>Section 1: Knowledge transfer and onboarding. EMP048 contributes to ast emp048 01 through recurring collaboration, clear ownership boundaries, and measurable outcomes. The team captures decisions, open issues, and handoffs so that knowledge remains discoverable for future programs.</a:t>
+            </a:r>
+          </a:p>
+          <a:p>
+            <a:pPr lvl="1"/>
+            <a:r>
+              <a:t>Section 2: Automation backlog refinement. EMP048 contributes to ast emp048 01 through recurring collaboration, clear ownership boundaries, and measurable outcomes. The team captures decisions, open issues, and handoffs so that knowledge remains discoverable for future programs.</a:t>
+            </a:r>
+          </a:p>
+          <a:p>
+            <a:pPr lvl="1"/>
+            <a:r>
+              <a:t>Section 3: Customer escalation analysis. EMP048 contributes to ast emp048 01 through recurring collaboration, clear ownership boundaries, and measurable outcomes. The team captures decisions, open issues, and handoffs so that knowledge remains discoverable for future programs.</a:t>
             </a:r>
           </a:p>
         </p:txBody>
@@ -3312,7 +3342,7 @@
           <a:lstStyle/>
           <a:p>
             <a:r>
-              <a:t>Architecture Review Outcomes</a:t>
+              <a:t>Ast Emp048 01 - EMP048</a:t>
             </a:r>
           </a:p>
         </p:txBody>
@@ -3333,17 +3363,103 @@
           <a:lstStyle/>
           <a:p>
             <a:r>
-              <a:t>Overview of Architecture Review Outcomes for Engineering department.</a:t>
-            </a:r>
-          </a:p>
-          <a:p>
-            <a:r>
-              <a:t>Responsible: Jamie Brown (Engineer)</a:t>
-            </a:r>
-          </a:p>
-          <a:p>
-            <a:r>
-              <a:t>Location: Fremont | Skills: Power BI, MLOps, Synapse, SQL</a:t>
+              <a:t>Slide 4: Executive Summary</a:t>
+            </a:r>
+          </a:p>
+          <a:p>
+            <a:pPr lvl="1"/>
+            <a:r>
+              <a:t>Section 1: Fabric semantic model planning. EMP048 contributes to ast emp048 01 through recurring collaboration, clear ownership boundaries, and measurable outcomes. The team captures decisions, open issues, and handoffs so that knowledge remains discoverable for future programs.</a:t>
+            </a:r>
+          </a:p>
+          <a:p>
+            <a:pPr lvl="1"/>
+            <a:r>
+              <a:t>Section 2: Department KPI performance. EMP048 contributes to ast emp048 01 through recurring collaboration, clear ownership boundaries, and measurable outcomes. The team captures decisions, open issues, and handoffs so that knowledge remains discoverable for future programs.</a:t>
+            </a:r>
+          </a:p>
+          <a:p>
+            <a:pPr lvl="1"/>
+            <a:r>
+              <a:t>Section 3: Fabric semantic model planning. EMP048 contributes to ast emp048 01 through recurring collaboration, clear ownership boundaries, and measurable outcomes. The team captures decisions, open issues, and handoffs so that knowledge remains discoverable for future programs.</a:t>
+            </a:r>
+          </a:p>
+        </p:txBody>
+      </p:sp>
+    </p:spTree>
+  </p:cSld>
+  <p:clrMapOvr>
+    <a:masterClrMapping/>
+  </p:clrMapOvr>
+</p:sld>
+</file>
+
+<file path=ppt/slides/slide5.xml><?xml version="1.0" encoding="utf-8"?>
+<p:sld xmlns:a="http://schemas.openxmlformats.org/drawingml/2006/main" xmlns:p="http://schemas.openxmlformats.org/presentationml/2006/main" xmlns:r="http://schemas.openxmlformats.org/officeDocument/2006/relationships">
+  <p:cSld>
+    <p:spTree>
+      <p:nvGrpSpPr>
+        <p:cNvPr id="1" name=""/>
+        <p:cNvGrpSpPr/>
+        <p:nvPr/>
+      </p:nvGrpSpPr>
+      <p:grpSpPr/>
+      <p:sp>
+        <p:nvSpPr>
+          <p:cNvPr id="2" name="Title 1"/>
+          <p:cNvSpPr>
+            <a:spLocks noGrp="1"/>
+          </p:cNvSpPr>
+          <p:nvPr>
+            <p:ph type="title"/>
+          </p:nvPr>
+        </p:nvSpPr>
+        <p:spPr/>
+        <p:txBody>
+          <a:bodyPr/>
+          <a:lstStyle/>
+          <a:p>
+            <a:r>
+              <a:t>Ast Emp048 01 - EMP048</a:t>
+            </a:r>
+          </a:p>
+        </p:txBody>
+      </p:sp>
+      <p:sp>
+        <p:nvSpPr>
+          <p:cNvPr id="3" name="Content Placeholder 2"/>
+          <p:cNvSpPr>
+            <a:spLocks noGrp="1"/>
+          </p:cNvSpPr>
+          <p:nvPr>
+            <p:ph idx="1"/>
+          </p:nvPr>
+        </p:nvSpPr>
+        <p:spPr/>
+        <p:txBody>
+          <a:bodyPr/>
+          <a:lstStyle/>
+          <a:p>
+            <a:r>
+              <a:t>Slide 5: Executive Summary</a:t>
+            </a:r>
+          </a:p>
+          <a:p>
+            <a:pPr lvl="1"/>
+            <a:r>
+              <a:t>Section 1: Data quality remediation. EMP048 contributes to ast emp048 01 through recurring collaboration, clear ownership boundaries, and measurable outcomes. The team captures decisions, open issues, and handoffs so that knowledge remains discoverable for future programs.</a:t>
+            </a:r>
+          </a:p>
+          <a:p>
+            <a:pPr lvl="1"/>
+            <a:r>
+              <a:t>Section 2: Fabric semantic model planning. EMP048 contributes to ast emp048 01 through recurring collaboration, clear ownership boundaries, and measurable outcomes. The team captures decisions, open issues, and handoffs so that knowledge remains discoverable for future programs.</a:t>
+            </a:r>
+          </a:p>
+          <a:p>
+            <a:pPr lvl="1"/>
+            <a:r>
+              <a:t>Section 3: Operational risk review. EMP048 contributes to ast emp048 01 through recurring collaboration, clear ownership boundaries, and measurable outcomes. The team captures decisions, open issues, and handoffs so that knowledge remains discoverable for future programs.</a:t>
             </a:r>
           </a:p>
         </p:txBody>
